--- a/reports/Aurora_Construction_Take_Home.pptx
+++ b/reports/Aurora_Construction_Take_Home.pptx
@@ -3374,7 +3374,7 @@
                 </a:solidFill>
                 <a:latin typeface="Calibri"/>
               </a:rPr>
-              <a:t>Q4: which route carries the most construction</a:t>
+              <a:t>Question 4: which route poses the greatest risk because of construction?</a:t>
             </a:r>
           </a:p>
         </p:txBody>
@@ -3446,8 +3446,8 @@
         </p:nvSpPr>
         <p:spPr>
           <a:xfrm>
-            <a:off x="8259775" y="6236208"/>
-            <a:ext cx="3383280" cy="502920"/>
+            <a:off x="6888175" y="6236208"/>
+            <a:ext cx="4754880" cy="502920"/>
           </a:xfrm>
           <a:prstGeom prst="rect">
             <a:avLst/>
@@ -3475,7 +3475,73 @@
                 </a:solidFill>
                 <a:latin typeface="Calibri"/>
               </a:rPr>
-              <a:t>Source: queries/08, fct_route_exposure  ·  data pulled 2026-10-26   ·   10</a:t>
+              <a:t>Source: </a:t>
+            </a:r>
+            <a:r>
+              <a:rPr sz="900" b="0" i="0" u="sng">
+                <a:solidFill>
+                  <a:srgbClr val="1368E5"/>
+                </a:solidFill>
+                <a:latin typeface="Calibri"/>
+                <a:hlinkClick r:id="rId3"/>
+              </a:rPr>
+              <a:t>query 8</a:t>
+            </a:r>
+            <a:r>
+              <a:rPr sz="900" b="0" i="0">
+                <a:solidFill>
+                  <a:srgbClr val="6B7B8C"/>
+                </a:solidFill>
+                <a:latin typeface="Calibri"/>
+              </a:rPr>
+              <a:t>, </a:t>
+            </a:r>
+            <a:r>
+              <a:rPr sz="900" b="0" i="0" u="sng">
+                <a:solidFill>
+                  <a:srgbClr val="1368E5"/>
+                </a:solidFill>
+                <a:latin typeface="Calibri"/>
+                <a:hlinkClick r:id="rId4"/>
+              </a:rPr>
+              <a:t>route matching</a:t>
+            </a:r>
+            <a:r>
+              <a:rPr sz="900" b="0" i="0">
+                <a:solidFill>
+                  <a:srgbClr val="6B7B8C"/>
+                </a:solidFill>
+                <a:latin typeface="Calibri"/>
+              </a:rPr>
+              <a:t>, </a:t>
+            </a:r>
+            <a:r>
+              <a:rPr sz="900" b="0" i="0" u="sng">
+                <a:solidFill>
+                  <a:srgbClr val="1368E5"/>
+                </a:solidFill>
+                <a:latin typeface="Calibri"/>
+                <a:hlinkClick r:id="rId5"/>
+              </a:rPr>
+              <a:t>bridge check</a:t>
+            </a:r>
+            <a:r>
+              <a:rPr sz="900" b="0" i="0">
+                <a:solidFill>
+                  <a:srgbClr val="6B7B8C"/>
+                </a:solidFill>
+                <a:latin typeface="Calibri"/>
+              </a:rPr>
+              <a:t>   ·   data pulled 2026-10-26</a:t>
+            </a:r>
+            <a:r>
+              <a:rPr sz="900" b="0" i="0">
+                <a:solidFill>
+                  <a:srgbClr val="6B7B8C"/>
+                </a:solidFill>
+                <a:latin typeface="Calibri"/>
+              </a:rPr>
+              <a:t>   ·   10</a:t>
             </a:r>
           </a:p>
         </p:txBody>
@@ -3489,7 +3555,7 @@
           <p:nvPr/>
         </p:nvPicPr>
         <p:blipFill>
-          <a:blip r:embed="rId3"/>
+          <a:blip r:embed="rId6"/>
           <a:stretch>
             <a:fillRect/>
           </a:stretch>
@@ -3497,7 +3563,7 @@
         <p:spPr>
           <a:xfrm>
             <a:off x="548640" y="1234439"/>
-            <a:ext cx="7315200" cy="3256521"/>
+            <a:ext cx="6766560" cy="3012282"/>
           </a:xfrm>
           <a:prstGeom prst="rect">
             <a:avLst/>
@@ -4022,8 +4088,8 @@
         </p:nvSpPr>
         <p:spPr>
           <a:xfrm>
-            <a:off x="548640" y="4343400"/>
-            <a:ext cx="11064240" cy="1828800"/>
+            <a:off x="548640" y="4114800"/>
+            <a:ext cx="11064240" cy="2011680"/>
           </a:xfrm>
           <a:prstGeom prst="rect">
             <a:avLst/>
@@ -4045,13 +4111,32 @@
               </a:spcAft>
             </a:pPr>
             <a:r>
-              <a:rPr sz="1200" b="0" i="0">
+              <a:rPr sz="1150" b="0" i="0">
                 <a:solidFill>
                   <a:srgbClr val="1F2937"/>
                 </a:solidFill>
                 <a:latin typeface="Calibri"/>
               </a:rPr>
-              <a:t>The routes are in the data as lists of coordinates and the events are points. I didn't have PostGIS installed and didn't want to add it for one question, so I did this in plain SQL: an event counts for a route if any point of it is within about 100 meters of the route, checking both ends of the event and, for the short ones, points along the line between them. Then hours per mile of route, so a long route isn't penalized for being long.</a:t>
+              <a:t>Each route came as a list of about 700 points along the road, a few dozen meters apart, and each construction event is a point too. So I counted an event toward a route if it fell within 100 meters of any of the route's points, checking both ends of the event and, for the short ones, a few points along the line between them. Then I added up the hours per route and divided by the route's length, so a longer route isn't riskier just for being long. It is all </a:t>
+            </a:r>
+            <a:r>
+              <a:rPr sz="1150" b="0" i="0" u="sng">
+                <a:solidFill>
+                  <a:srgbClr val="1368E5"/>
+                </a:solidFill>
+                <a:latin typeface="Calibri"/>
+                <a:hlinkClick r:id="rId4"/>
+              </a:rPr>
+              <a:t>SQL in the repo</a:t>
+            </a:r>
+            <a:r>
+              <a:rPr sz="1150" b="0" i="0">
+                <a:solidFill>
+                  <a:srgbClr val="1F2937"/>
+                </a:solidFill>
+                <a:latin typeface="Calibri"/>
+              </a:rPr>
+              <a:t>.</a:t>
             </a:r>
           </a:p>
           <a:p>
@@ -4064,13 +4149,32 @@
               </a:spcAft>
             </a:pPr>
             <a:r>
-              <a:rPr sz="1200" b="0" i="0">
+              <a:rPr sz="1150" b="0" i="0">
                 <a:solidFill>
                   <a:srgbClr val="1F2937"/>
                 </a:solidFill>
                 <a:latin typeface="Calibri"/>
               </a:rPr>
-              <a:t>Berkeley carries the most construction per mile, over the five years and in the most recent year, and weighting by severity gives the same order. But the leader changed every couple of years, and Berkeley's 2021 is 71% of its five-year total, the same 2021 effect as the cities. What is stable: the three bridge routes are always the top three, and Pacifica is at or near the bottom every year.</a:t>
+              <a:t>Berkeley carries the most construction per mile, over the five years and in the most recent year, and weighting by severity gives the same order. But the leader changed every couple of years, and Berkeley's 2021 is 71% of its five-year total, the same 2021 effect as the cities. To make sense of that I </a:t>
+            </a:r>
+            <a:r>
+              <a:rPr sz="1150" b="0" i="0" u="sng">
+                <a:solidFill>
+                  <a:srgbClr val="1368E5"/>
+                </a:solidFill>
+                <a:latin typeface="Calibri"/>
+                <a:hlinkClick r:id="rId5"/>
+              </a:rPr>
+              <a:t>checked where the routes go</a:t>
+            </a:r>
+            <a:r>
+              <a:rPr sz="1150" b="0" i="0">
+                <a:solidFill>
+                  <a:srgbClr val="1F2937"/>
+                </a:solidFill>
+                <a:latin typeface="Calibri"/>
+              </a:rPr>
+              <a:t>: Berkeley and San Leandro both cross the Bay Bridge (their points pass 165 m from Yerba Buena Island), San Rafael crosses the Golden Gate (87 m from mid-span), and San Mateo and Pacifica stay on the peninsula. The three bridge routes are the top three every year; Pacifica is at or near the bottom every year.</a:t>
             </a:r>
           </a:p>
         </p:txBody>
@@ -4130,7 +4234,7 @@
                 </a:solidFill>
                 <a:latin typeface="Calibri"/>
               </a:rPr>
-              <a:t>Q4: checking what the model actually matched</a:t>
+              <a:t>Question 4: checking what the matching actually found</a:t>
             </a:r>
           </a:p>
         </p:txBody>
@@ -4202,8 +4306,8 @@
         </p:nvSpPr>
         <p:spPr>
           <a:xfrm>
-            <a:off x="8259775" y="6236208"/>
-            <a:ext cx="3383280" cy="502920"/>
+            <a:off x="6888175" y="6236208"/>
+            <a:ext cx="4754880" cy="502920"/>
           </a:xfrm>
           <a:prstGeom prst="rect">
             <a:avLst/>
@@ -4231,7 +4335,54 @@
                 </a:solidFill>
                 <a:latin typeface="Calibri"/>
               </a:rPr>
-              <a:t>Source: queries/09, int_route_events  ·  data pulled 2026-10-26   ·   11</a:t>
+              <a:t>Source: </a:t>
+            </a:r>
+            <a:r>
+              <a:rPr sz="900" b="0" i="0" u="sng">
+                <a:solidFill>
+                  <a:srgbClr val="1368E5"/>
+                </a:solidFill>
+                <a:latin typeface="Calibri"/>
+                <a:hlinkClick r:id="rId3"/>
+              </a:rPr>
+              <a:t>query 9</a:t>
+            </a:r>
+            <a:r>
+              <a:rPr sz="900" b="0" i="0">
+                <a:solidFill>
+                  <a:srgbClr val="6B7B8C"/>
+                </a:solidFill>
+                <a:latin typeface="Calibri"/>
+              </a:rPr>
+              <a:t>, </a:t>
+            </a:r>
+            <a:r>
+              <a:rPr sz="900" b="0" i="0" u="sng">
+                <a:solidFill>
+                  <a:srgbClr val="1368E5"/>
+                </a:solidFill>
+                <a:latin typeface="Calibri"/>
+                <a:hlinkClick r:id="rId4"/>
+              </a:rPr>
+              <a:t>route matching</a:t>
+            </a:r>
+            <a:r>
+              <a:rPr sz="900" b="0" i="0">
+                <a:solidFill>
+                  <a:srgbClr val="6B7B8C"/>
+                </a:solidFill>
+                <a:latin typeface="Calibri"/>
+              </a:rPr>
+              <a:t>   ·   data pulled 2026-10-26</a:t>
+            </a:r>
+            <a:r>
+              <a:rPr sz="900" b="0" i="0">
+                <a:solidFill>
+                  <a:srgbClr val="6B7B8C"/>
+                </a:solidFill>
+                <a:latin typeface="Calibri"/>
+              </a:rPr>
+              <a:t>   ·   11</a:t>
             </a:r>
           </a:p>
         </p:txBody>
@@ -5167,7 +5318,7 @@
                 </a:solidFill>
                 <a:latin typeface="Calibri"/>
               </a:rPr>
-              <a:t>To make sure the matching did what I thought, I pulled the biggest events on the Berkeley route in 2021: I-80 at Ashby, Cleveland Street, the Bay Bridge piers, Treasure Island, the Yerba Buena tunnel. That is what I'd expect to see.</a:t>
+              <a:t>To make sure the matching did what I thought, I pulled the biggest events on the Berkeley route in 2021: I-80 at Ashby, Cleveland Street, the Bay Bridge piers, Treasure Island, the Yerba Buena tunnel. That is what I'd expect to see on that road.</a:t>
             </a:r>
           </a:p>
           <a:p>
@@ -5288,7 +5439,7 @@
                 </a:solidFill>
                 <a:latin typeface="Calibri"/>
               </a:rPr>
-              <a:t>Q5: presenting the Q4 answer to two audiences</a:t>
+              <a:t>Question 5: how would I present the Q4 answer to engineers versus executives?</a:t>
             </a:r>
           </a:p>
         </p:txBody>
@@ -5360,8 +5511,8 @@
         </p:nvSpPr>
         <p:spPr>
           <a:xfrm>
-            <a:off x="8259775" y="6236208"/>
-            <a:ext cx="3383280" cy="502920"/>
+            <a:off x="6888175" y="6236208"/>
+            <a:ext cx="4754880" cy="502920"/>
           </a:xfrm>
           <a:prstGeom prst="rect">
             <a:avLst/>
@@ -5389,7 +5540,7 @@
                 </a:solidFill>
                 <a:latin typeface="Calibri"/>
               </a:rPr>
-              <a:t>12</a:t>
+              <a:t>   ·   12</a:t>
             </a:r>
           </a:p>
         </p:txBody>
@@ -5515,7 +5666,7 @@
                 </a:solidFill>
                 <a:latin typeface="Calibri"/>
               </a:rPr>
-              <a:t>I found this one hard, because there isn't a definitive answer to give: the riskiest route keeps changing year over year. For engineers that is the answer. I'd show the year-by-year table, walk through how the matching works, and be specific about where it is weak: events are two points, long ones get undercounted, the two bridge routes share an approach.</a:t>
+              <a:t>I found this one hard, because there isn't a definitive answer to give: the riskiest route keeps changing year over year. For engineers that is the answer. I'd show the year-by-year table, walk through how the matching works, and be specific about where it is weak: events are two points, long ones get undercounted, two of the routes share the Bay Bridge approach.</a:t>
             </a:r>
           </a:p>
           <a:p>
@@ -5660,7 +5811,7 @@
                 </a:solidFill>
                 <a:latin typeface="Calibri"/>
               </a:rPr>
-              <a:t>I'd lead with what I can say clearly: Pacifica is the lowest-exposure route every year, the three bridge routes carry roughly twice the construction per mile, and Berkeley leads in the most recent year. If one route runs for a year, Pacifica minimizes construction exposure and Berkeley maximizes it.</a:t>
+              <a:t>I'd lead with what I can say clearly: Pacifica is the lowest-exposure route every year, the three routes that cross a bridge carry roughly twice the construction per mile, and Berkeley leads in the most recent year. If one route runs for a year, Pacifica minimizes construction exposure and Berkeley maximizes it.</a:t>
             </a:r>
           </a:p>
           <a:p>
@@ -5739,7 +5890,7 @@
                 </a:solidFill>
                 <a:latin typeface="Calibri"/>
               </a:rPr>
-              <a:t>Q6: how I used AI</a:t>
+              <a:t>Question 6: what AI tools did I use, how, and why?</a:t>
             </a:r>
           </a:p>
         </p:txBody>
@@ -5811,8 +5962,8 @@
         </p:nvSpPr>
         <p:spPr>
           <a:xfrm>
-            <a:off x="8259775" y="6236208"/>
-            <a:ext cx="3383280" cy="502920"/>
+            <a:off x="6888175" y="6236208"/>
+            <a:ext cx="4754880" cy="502920"/>
           </a:xfrm>
           <a:prstGeom prst="rect">
             <a:avLst/>
@@ -5840,7 +5991,35 @@
                 </a:solidFill>
                 <a:latin typeface="Calibri"/>
               </a:rPr>
-              <a:t>Source: process.md  ·  data pulled 2026-10-26   ·   13</a:t>
+              <a:t>Source: </a:t>
+            </a:r>
+            <a:r>
+              <a:rPr sz="900" b="0" i="0" u="sng">
+                <a:solidFill>
+                  <a:srgbClr val="1368E5"/>
+                </a:solidFill>
+                <a:latin typeface="Calibri"/>
+                <a:hlinkClick r:id="rId3"/>
+              </a:rPr>
+              <a:t>process log</a:t>
+            </a:r>
+            <a:r>
+              <a:rPr sz="900" b="0" i="0">
+                <a:solidFill>
+                  <a:srgbClr val="6B7B8C"/>
+                </a:solidFill>
+                <a:latin typeface="Calibri"/>
+              </a:rPr>
+              <a:t>   ·   data pulled 2026-10-26</a:t>
+            </a:r>
+            <a:r>
+              <a:rPr sz="900" b="0" i="0">
+                <a:solidFill>
+                  <a:srgbClr val="6B7B8C"/>
+                </a:solidFill>
+                <a:latin typeface="Calibri"/>
+              </a:rPr>
+              <a:t>   ·   13</a:t>
             </a:r>
           </a:p>
         </p:txBody>
@@ -5920,7 +6099,26 @@
                 </a:solidFill>
                 <a:latin typeface="Calibri"/>
               </a:rPr>
-              <a:t>I made the calls. The dedup rule, the words for the seasonal-closure filter, the five-year window, the 100-meter buffer, which year to lead with. I ran every query, read every result, and kept a log of the whole process in the repo.</a:t>
+              <a:t>I made the calls. The dedup rule, the words for the seasonal-closure filter, the five-year window, the 100-meter buffer, which year to lead with. I ran every query, read every result, and kept a </a:t>
+            </a:r>
+            <a:r>
+              <a:rPr sz="1250" b="0" i="0" u="sng">
+                <a:solidFill>
+                  <a:srgbClr val="1368E5"/>
+                </a:solidFill>
+                <a:latin typeface="Calibri"/>
+                <a:hlinkClick r:id="rId3"/>
+              </a:rPr>
+              <a:t>log of the whole process</a:t>
+            </a:r>
+            <a:r>
+              <a:rPr sz="1250" b="0" i="0">
+                <a:solidFill>
+                  <a:srgbClr val="1F2937"/>
+                </a:solidFill>
+                <a:latin typeface="Calibri"/>
+              </a:rPr>
+              <a:t> in the repo.</a:t>
             </a:r>
           </a:p>
         </p:txBody>
@@ -6193,8 +6391,8 @@
         </p:nvSpPr>
         <p:spPr>
           <a:xfrm>
-            <a:off x="8259775" y="6236208"/>
-            <a:ext cx="3383280" cy="502920"/>
+            <a:off x="6888175" y="6236208"/>
+            <a:ext cx="4754880" cy="502920"/>
           </a:xfrm>
           <a:prstGeom prst="rect">
             <a:avLst/>
@@ -6222,7 +6420,7 @@
                 </a:solidFill>
                 <a:latin typeface="Calibri"/>
               </a:rPr>
-              <a:t>14</a:t>
+              <a:t>   ·   14</a:t>
             </a:r>
           </a:p>
         </p:txBody>
@@ -6561,7 +6759,7 @@
                 </a:solidFill>
                 <a:latin typeface="Calibri"/>
               </a:rPr>
-              <a:t>Work out which provider each row came from. The wind column is spelled two ways, and that probably dates the feed changes.</a:t>
+              <a:t>Work out which provider each row came from. The wind column is spelled two ways, and that probably dates the feed changes. Their share by state would test the coverage hypothesis, along with an outside benchmark like FHWA state DOT spending per lane-mile.</a:t>
             </a:r>
           </a:p>
           <a:p>
@@ -6732,7 +6930,7 @@
         <p:spPr>
           <a:xfrm>
             <a:off x="548640" y="6236208"/>
-            <a:ext cx="7498079" cy="502920"/>
+            <a:ext cx="6309360" cy="502920"/>
           </a:xfrm>
           <a:prstGeom prst="rect">
             <a:avLst/>
@@ -6760,7 +6958,7 @@
                 </a:solidFill>
                 <a:latin typeface="Calibri"/>
               </a:rPr>
-              <a:t>reports/pull_deck_data.py runs these against the database and writes one CSV each; build_charts.py and build_deck.py read the CSVs and nothing else.</a:t>
+              <a:t>pull_deck_data.py runs these against the database and writes one CSV each; build_charts.py and build_deck.py read the CSVs and nothing else.</a:t>
             </a:r>
           </a:p>
         </p:txBody>
@@ -6773,8 +6971,8 @@
         </p:nvSpPr>
         <p:spPr>
           <a:xfrm>
-            <a:off x="8259775" y="6236208"/>
-            <a:ext cx="3383280" cy="502920"/>
+            <a:off x="6888175" y="6236208"/>
+            <a:ext cx="4754880" cy="502920"/>
           </a:xfrm>
           <a:prstGeom prst="rect">
             <a:avLst/>
@@ -6802,7 +7000,54 @@
                 </a:solidFill>
                 <a:latin typeface="Calibri"/>
               </a:rPr>
-              <a:t>15</a:t>
+              <a:t>Source: </a:t>
+            </a:r>
+            <a:r>
+              <a:rPr sz="900" b="0" i="0" u="sng">
+                <a:solidFill>
+                  <a:srgbClr val="1368E5"/>
+                </a:solidFill>
+                <a:latin typeface="Calibri"/>
+                <a:hlinkClick r:id="rId3"/>
+              </a:rPr>
+              <a:t>reports/</a:t>
+            </a:r>
+            <a:r>
+              <a:rPr sz="900" b="0" i="0">
+                <a:solidFill>
+                  <a:srgbClr val="6B7B8C"/>
+                </a:solidFill>
+                <a:latin typeface="Calibri"/>
+              </a:rPr>
+              <a:t>, </a:t>
+            </a:r>
+            <a:r>
+              <a:rPr sz="900" b="0" i="0" u="sng">
+                <a:solidFill>
+                  <a:srgbClr val="1368E5"/>
+                </a:solidFill>
+                <a:latin typeface="Calibri"/>
+                <a:hlinkClick r:id="rId4"/>
+              </a:rPr>
+              <a:t>deck builder</a:t>
+            </a:r>
+            <a:r>
+              <a:rPr sz="900" b="0" i="0">
+                <a:solidFill>
+                  <a:srgbClr val="6B7B8C"/>
+                </a:solidFill>
+                <a:latin typeface="Calibri"/>
+              </a:rPr>
+              <a:t>   ·   data pulled 2026-10-26</a:t>
+            </a:r>
+            <a:r>
+              <a:rPr sz="900" b="0" i="0">
+                <a:solidFill>
+                  <a:srgbClr val="6B7B8C"/>
+                </a:solidFill>
+                <a:latin typeface="Calibri"/>
+              </a:rPr>
+              <a:t>   ·   15</a:t>
             </a:r>
           </a:p>
         </p:txBody>
@@ -6982,7 +7227,7 @@
                           </a:solidFill>
                           <a:latin typeface="Calibri"/>
                         </a:rPr>
-                        <a:t>queries/10, queries/12</a:t>
+                        <a:t>queries/10, 12, 13</a:t>
                       </a:r>
                     </a:p>
                   </a:txBody>
@@ -7028,7 +7273,7 @@
                           </a:solidFill>
                           <a:latin typeface="Calibri"/>
                         </a:rPr>
-                        <a:t>row counts, flag counts, mean and median</a:t>
+                        <a:t>row counts, flag counts, what the first filter caught</a:t>
                       </a:r>
                     </a:p>
                   </a:txBody>
@@ -7452,7 +7697,7 @@
                           </a:solidFill>
                           <a:latin typeface="Calibri"/>
                         </a:rPr>
-                        <a:t>queries/08_q4_route_exposure</a:t>
+                        <a:t>queries/08, check_route_bridges.py</a:t>
                       </a:r>
                     </a:p>
                   </a:txBody>
@@ -7475,7 +7720,7 @@
                           </a:solidFill>
                           <a:latin typeface="Calibri"/>
                         </a:rPr>
-                        <a:t>fct_route_exposure</a:t>
+                        <a:t>fct_route_exposure, sf_paths</a:t>
                       </a:r>
                     </a:p>
                   </a:txBody>
@@ -7498,7 +7743,7 @@
                           </a:solidFill>
                           <a:latin typeface="Calibri"/>
                         </a:rPr>
-                        <a:t>Q4 by route and year</a:t>
+                        <a:t>Q4 by route and year; which routes cross a bridge</a:t>
                       </a:r>
                     </a:p>
                   </a:txBody>
@@ -7701,48 +7946,6 @@
           </a:graphicData>
         </a:graphic>
       </p:graphicFrame>
-      <p:sp>
-        <p:nvSpPr>
-          <p:cNvPr id="8" name="TextBox 7"/>
-          <p:cNvSpPr txBox="1"/>
-          <p:nvPr/>
-        </p:nvSpPr>
-        <p:spPr>
-          <a:xfrm>
-            <a:off x="548640" y="4754880"/>
-            <a:ext cx="11064240" cy="1188720"/>
-          </a:xfrm>
-          <a:prstGeom prst="rect">
-            <a:avLst/>
-          </a:prstGeom>
-          <a:noFill/>
-        </p:spPr>
-        <p:txBody>
-          <a:bodyPr wrap="square" lIns="0" rIns="0" tIns="0" bIns="0" anchor="t">
-            <a:spAutoFit/>
-          </a:bodyPr>
-          <a:lstStyle/>
-          <a:p>
-            <a:pPr algn="l">
-              <a:lnSpc>
-                <a:spcPct val="118000"/>
-              </a:lnSpc>
-              <a:spcAft>
-                <a:spcPts val="1000"/>
-              </a:spcAft>
-            </a:pPr>
-            <a:r>
-              <a:rPr sz="1150" b="0" i="0">
-                <a:solidFill>
-                  <a:srgbClr val="1F2937"/>
-                </a:solidFill>
-                <a:latin typeface="Calibri"/>
-              </a:rPr>
-              <a:t>What would test the coverage hypothesis on slide 9: the two spellings in the wind column mark two feeds, so their share by state is a provider fingerprint; description templates by state; and an outside benchmark such as FHWA state DOT spending per lane-mile.</a:t>
-            </a:r>
-          </a:p>
-        </p:txBody>
-      </p:sp>
     </p:spTree>
   </p:cSld>
   <p:clrMapOvr>
@@ -7798,7 +8001,7 @@
                 </a:solidFill>
                 <a:latin typeface="Calibri"/>
               </a:rPr>
-              <a:t>What this case study is</a:t>
+              <a:t>The questions</a:t>
             </a:r>
           </a:p>
         </p:txBody>
@@ -7870,8 +8073,8 @@
         </p:nvSpPr>
         <p:spPr>
           <a:xfrm>
-            <a:off x="8259775" y="6236208"/>
-            <a:ext cx="3383280" cy="502920"/>
+            <a:off x="6888175" y="6236208"/>
+            <a:ext cx="4754880" cy="502920"/>
           </a:xfrm>
           <a:prstGeom prst="rect">
             <a:avLst/>
@@ -7899,7 +8102,54 @@
                 </a:solidFill>
                 <a:latin typeface="Calibri"/>
               </a:rPr>
-              <a:t>2</a:t>
+              <a:t>Source: </a:t>
+            </a:r>
+            <a:r>
+              <a:rPr sz="900" b="0" i="0" u="sng">
+                <a:solidFill>
+                  <a:srgbClr val="1368E5"/>
+                </a:solidFill>
+                <a:latin typeface="Calibri"/>
+                <a:hlinkClick r:id="rId3"/>
+              </a:rPr>
+              <a:t>repo</a:t>
+            </a:r>
+            <a:r>
+              <a:rPr sz="900" b="0" i="0">
+                <a:solidFill>
+                  <a:srgbClr val="6B7B8C"/>
+                </a:solidFill>
+                <a:latin typeface="Calibri"/>
+              </a:rPr>
+              <a:t>, </a:t>
+            </a:r>
+            <a:r>
+              <a:rPr sz="900" b="0" i="0" u="sng">
+                <a:solidFill>
+                  <a:srgbClr val="1368E5"/>
+                </a:solidFill>
+                <a:latin typeface="Calibri"/>
+                <a:hlinkClick r:id="rId4"/>
+              </a:rPr>
+              <a:t>process log</a:t>
+            </a:r>
+            <a:r>
+              <a:rPr sz="900" b="0" i="0">
+                <a:solidFill>
+                  <a:srgbClr val="6B7B8C"/>
+                </a:solidFill>
+                <a:latin typeface="Calibri"/>
+              </a:rPr>
+              <a:t>   ·   data pulled 2026-10-26</a:t>
+            </a:r>
+            <a:r>
+              <a:rPr sz="900" b="0" i="0">
+                <a:solidFill>
+                  <a:srgbClr val="6B7B8C"/>
+                </a:solidFill>
+                <a:latin typeface="Calibri"/>
+              </a:rPr>
+              <a:t>   ·   2</a:t>
             </a:r>
           </a:p>
         </p:txBody>
@@ -7913,7 +8163,7 @@
         <p:spPr>
           <a:xfrm>
             <a:off x="548640" y="1325880"/>
-            <a:ext cx="5486400" cy="4389120"/>
+            <a:ext cx="6949440" cy="4389120"/>
           </a:xfrm>
           <a:prstGeom prst="rect">
             <a:avLst/>
@@ -7935,13 +8185,13 @@
               </a:spcAft>
             </a:pPr>
             <a:r>
-              <a:rPr sz="1350" b="0" i="0">
+              <a:rPr sz="1400" b="0" i="0">
                 <a:solidFill>
                   <a:srgbClr val="1F2937"/>
                 </a:solidFill>
                 <a:latin typeface="Calibri"/>
               </a:rPr>
-              <a:t>Aurora gave me a public dataset of road construction and closure events across the US, about six million of them from 2016 through 2021, along with five possible self-driving routes out of San Francisco. The ask was to answer six questions with it, in SQL or Python, and to show the work.</a:t>
+              <a:t>1.  Over the past five years, which city has had the most hours of construction?</a:t>
             </a:r>
           </a:p>
           <a:p>
@@ -7954,13 +8204,13 @@
               </a:spcAft>
             </a:pPr>
             <a:r>
-              <a:rPr sz="1350" b="0" i="0">
+              <a:rPr sz="1400" b="0" i="0">
                 <a:solidFill>
                   <a:srgbClr val="1F2937"/>
                 </a:solidFill>
                 <a:latin typeface="Calibri"/>
               </a:rPr>
-              <a:t>Construction matters for a self-driving truck because it is the thing that changes the road from what the maps say: lanes shift, cones appear, people direct traffic by hand. So the questions are really about where and when a truck is most likely to run into it.</a:t>
+              <a:t>2.  How has this changed over time?</a:t>
             </a:r>
           </a:p>
           <a:p>
@@ -7973,13 +8223,70 @@
               </a:spcAft>
             </a:pPr>
             <a:r>
-              <a:rPr sz="1350" b="0" i="0">
+              <a:rPr sz="1400" b="0" i="0">
                 <a:solidFill>
                   <a:srgbClr val="1F2937"/>
                 </a:solidFill>
                 <a:latin typeface="Calibri"/>
               </a:rPr>
-              <a:t>This deck walks through what I did in the order I did it: setting up, looking at the data, fixing what I found, and then the questions.</a:t>
+              <a:t>3.  Accounting for varying city sizes, how do the ten largest US cities compare?</a:t>
+            </a:r>
+          </a:p>
+          <a:p>
+            <a:pPr algn="l">
+              <a:lnSpc>
+                <a:spcPct val="118000"/>
+              </a:lnSpc>
+              <a:spcAft>
+                <a:spcPts val="1000"/>
+              </a:spcAft>
+            </a:pPr>
+            <a:r>
+              <a:rPr sz="1400" b="0" i="0">
+                <a:solidFill>
+                  <a:srgbClr val="1F2937"/>
+                </a:solidFill>
+                <a:latin typeface="Calibri"/>
+              </a:rPr>
+              <a:t>4.  Of five potential self-driving routes, which poses the greatest risk of autonomy challenges because of construction?</a:t>
+            </a:r>
+          </a:p>
+          <a:p>
+            <a:pPr algn="l">
+              <a:lnSpc>
+                <a:spcPct val="118000"/>
+              </a:lnSpc>
+              <a:spcAft>
+                <a:spcPts val="1000"/>
+              </a:spcAft>
+            </a:pPr>
+            <a:r>
+              <a:rPr sz="1400" b="0" i="0">
+                <a:solidFill>
+                  <a:srgbClr val="1F2937"/>
+                </a:solidFill>
+                <a:latin typeface="Calibri"/>
+              </a:rPr>
+              <a:t>5.  How would I present that answer differently to engineers and to executives?</a:t>
+            </a:r>
+          </a:p>
+          <a:p>
+            <a:pPr algn="l">
+              <a:lnSpc>
+                <a:spcPct val="118000"/>
+              </a:lnSpc>
+              <a:spcAft>
+                <a:spcPts val="1000"/>
+              </a:spcAft>
+            </a:pPr>
+            <a:r>
+              <a:rPr sz="1400" b="0" i="0">
+                <a:solidFill>
+                  <a:srgbClr val="1F2937"/>
+                </a:solidFill>
+                <a:latin typeface="Calibri"/>
+              </a:rPr>
+              <a:t>6.  What AI-based tools did I use, how, and why?</a:t>
             </a:r>
           </a:p>
         </p:txBody>
@@ -7992,8 +8299,8 @@
         </p:nvSpPr>
         <p:spPr>
           <a:xfrm>
-            <a:off x="6492240" y="1325880"/>
-            <a:ext cx="5120640" cy="365760"/>
+            <a:off x="7955279" y="1325880"/>
+            <a:ext cx="3657600" cy="4389120"/>
           </a:xfrm>
           <a:prstGeom prst="rect">
             <a:avLst/>
@@ -8008,45 +8315,22 @@
           <a:p>
             <a:pPr algn="l">
               <a:lnSpc>
-                <a:spcPct val="110000"/>
+                <a:spcPct val="118000"/>
               </a:lnSpc>
               <a:spcAft>
-                <a:spcPts val="400"/>
+                <a:spcPts val="1000"/>
               </a:spcAft>
             </a:pPr>
             <a:r>
-              <a:rPr sz="1400" b="1" i="0">
+              <a:rPr sz="1300" b="0" i="0">
                 <a:solidFill>
                   <a:srgbClr val="1F2937"/>
                 </a:solidFill>
                 <a:latin typeface="Calibri"/>
               </a:rPr>
-              <a:t>The six questions</a:t>
-            </a:r>
-          </a:p>
-        </p:txBody>
-      </p:sp>
-      <p:sp>
-        <p:nvSpPr>
-          <p:cNvPr id="8" name="TextBox 7"/>
-          <p:cNvSpPr txBox="1"/>
-          <p:nvPr/>
-        </p:nvSpPr>
-        <p:spPr>
-          <a:xfrm>
-            <a:off x="6492240" y="1783080"/>
-            <a:ext cx="5120640" cy="4206240"/>
-          </a:xfrm>
-          <a:prstGeom prst="rect">
-            <a:avLst/>
-          </a:prstGeom>
-          <a:noFill/>
-        </p:spPr>
-        <p:txBody>
-          <a:bodyPr wrap="square" lIns="0" rIns="0" tIns="0" bIns="0" anchor="t">
-            <a:spAutoFit/>
-          </a:bodyPr>
-          <a:lstStyle/>
+              <a:t>This deck goes through what I did in the order I did it: setting up, looking at the data, fixing what I found, then the questions.</a:t>
+            </a:r>
+          </a:p>
           <a:p>
             <a:pPr algn="l">
               <a:lnSpc>
@@ -8063,18 +8347,18 @@
                 </a:solidFill>
                 <a:latin typeface="Calibri"/>
               </a:rPr>
-              <a:t>1.  Over the past five years, which city has had the most hours of construction?</a:t>
-            </a:r>
-          </a:p>
-          <a:p>
-            <a:pPr algn="l">
-              <a:lnSpc>
-                <a:spcPct val="118000"/>
-              </a:lnSpc>
-              <a:spcAft>
-                <a:spcPts val="1000"/>
-              </a:spcAft>
-            </a:pPr>
+              <a:t>All of the code is in the repo, and each slide links to the model or query behind it. The log I kept along the way is </a:t>
+            </a:r>
+            <a:r>
+              <a:rPr sz="1300" b="0" i="0" u="sng">
+                <a:solidFill>
+                  <a:srgbClr val="1368E5"/>
+                </a:solidFill>
+                <a:latin typeface="Calibri"/>
+                <a:hlinkClick r:id="rId4"/>
+              </a:rPr>
+              <a:t>process.md</a:t>
+            </a:r>
             <a:r>
               <a:rPr sz="1300" b="0" i="0">
                 <a:solidFill>
@@ -8082,83 +8366,7 @@
                 </a:solidFill>
                 <a:latin typeface="Calibri"/>
               </a:rPr>
-              <a:t>2.  How has that changed over time?</a:t>
-            </a:r>
-          </a:p>
-          <a:p>
-            <a:pPr algn="l">
-              <a:lnSpc>
-                <a:spcPct val="118000"/>
-              </a:lnSpc>
-              <a:spcAft>
-                <a:spcPts val="1000"/>
-              </a:spcAft>
-            </a:pPr>
-            <a:r>
-              <a:rPr sz="1300" b="0" i="0">
-                <a:solidFill>
-                  <a:srgbClr val="1F2937"/>
-                </a:solidFill>
-                <a:latin typeface="Calibri"/>
-              </a:rPr>
-              <a:t>3.  Accounting for city size, how do the ten largest US cities compare?</a:t>
-            </a:r>
-          </a:p>
-          <a:p>
-            <a:pPr algn="l">
-              <a:lnSpc>
-                <a:spcPct val="118000"/>
-              </a:lnSpc>
-              <a:spcAft>
-                <a:spcPts val="1000"/>
-              </a:spcAft>
-            </a:pPr>
-            <a:r>
-              <a:rPr sz="1300" b="0" i="0">
-                <a:solidFill>
-                  <a:srgbClr val="1F2937"/>
-                </a:solidFill>
-                <a:latin typeface="Calibri"/>
-              </a:rPr>
-              <a:t>4.  Of five candidate routes, which poses the greatest construction risk over a year?</a:t>
-            </a:r>
-          </a:p>
-          <a:p>
-            <a:pPr algn="l">
-              <a:lnSpc>
-                <a:spcPct val="118000"/>
-              </a:lnSpc>
-              <a:spcAft>
-                <a:spcPts val="1000"/>
-              </a:spcAft>
-            </a:pPr>
-            <a:r>
-              <a:rPr sz="1300" b="0" i="0">
-                <a:solidFill>
-                  <a:srgbClr val="1F2937"/>
-                </a:solidFill>
-                <a:latin typeface="Calibri"/>
-              </a:rPr>
-              <a:t>5.  How would I present that answer differently to engineers and to executives?</a:t>
-            </a:r>
-          </a:p>
-          <a:p>
-            <a:pPr algn="l">
-              <a:lnSpc>
-                <a:spcPct val="118000"/>
-              </a:lnSpc>
-              <a:spcAft>
-                <a:spcPts val="1000"/>
-              </a:spcAft>
-            </a:pPr>
-            <a:r>
-              <a:rPr sz="1300" b="0" i="0">
-                <a:solidFill>
-                  <a:srgbClr val="1F2937"/>
-                </a:solidFill>
-                <a:latin typeface="Calibri"/>
-              </a:rPr>
-              <a:t>6.  What AI tools did I use, how, and why?</a:t>
+              <a:t>.</a:t>
             </a:r>
           </a:p>
         </p:txBody>
@@ -8290,8 +8498,8 @@
         </p:nvSpPr>
         <p:spPr>
           <a:xfrm>
-            <a:off x="8259775" y="6236208"/>
-            <a:ext cx="3383280" cy="502920"/>
+            <a:off x="6888175" y="6236208"/>
+            <a:ext cx="4754880" cy="502920"/>
           </a:xfrm>
           <a:prstGeom prst="rect">
             <a:avLst/>
@@ -8319,7 +8527,54 @@
                 </a:solidFill>
                 <a:latin typeface="Calibri"/>
               </a:rPr>
-              <a:t>Source: scripts/load_raw.py, queries/12  ·  data pulled 2026-10-26   ·   3</a:t>
+              <a:t>Source: </a:t>
+            </a:r>
+            <a:r>
+              <a:rPr sz="900" b="0" i="0" u="sng">
+                <a:solidFill>
+                  <a:srgbClr val="1368E5"/>
+                </a:solidFill>
+                <a:latin typeface="Calibri"/>
+                <a:hlinkClick r:id="rId3"/>
+              </a:rPr>
+              <a:t>loader</a:t>
+            </a:r>
+            <a:r>
+              <a:rPr sz="900" b="0" i="0">
+                <a:solidFill>
+                  <a:srgbClr val="6B7B8C"/>
+                </a:solidFill>
+                <a:latin typeface="Calibri"/>
+              </a:rPr>
+              <a:t>, </a:t>
+            </a:r>
+            <a:r>
+              <a:rPr sz="900" b="0" i="0" u="sng">
+                <a:solidFill>
+                  <a:srgbClr val="1368E5"/>
+                </a:solidFill>
+                <a:latin typeface="Calibri"/>
+                <a:hlinkClick r:id="rId4"/>
+              </a:rPr>
+              <a:t>query 12</a:t>
+            </a:r>
+            <a:r>
+              <a:rPr sz="900" b="0" i="0">
+                <a:solidFill>
+                  <a:srgbClr val="6B7B8C"/>
+                </a:solidFill>
+                <a:latin typeface="Calibri"/>
+              </a:rPr>
+              <a:t>   ·   data pulled 2026-10-26</a:t>
+            </a:r>
+            <a:r>
+              <a:rPr sz="900" b="0" i="0">
+                <a:solidFill>
+                  <a:srgbClr val="6B7B8C"/>
+                </a:solidFill>
+                <a:latin typeface="Calibri"/>
+              </a:rPr>
+              <a:t>   ·   3</a:t>
             </a:r>
           </a:p>
         </p:txBody>
@@ -8333,7 +8588,7 @@
         <p:spPr>
           <a:xfrm>
             <a:off x="548640" y="1325880"/>
-            <a:ext cx="6766560" cy="3017520"/>
+            <a:ext cx="6766560" cy="3291840"/>
           </a:xfrm>
           <a:prstGeom prst="rect">
             <a:avLst/>
@@ -8380,7 +8635,45 @@
                 </a:solidFill>
                 <a:latin typeface="Calibri"/>
               </a:rPr>
-              <a:t>The load itself was a short Python script that creates the table with proper column types and streams the file in. If a value had not fit its type the load would have failed, and it didn't, so that was my first check. The five routes are a tiny file, so they went into dbt as a seed.</a:t>
+              <a:t>The load itself was a </a:t>
+            </a:r>
+            <a:r>
+              <a:rPr sz="1350" b="0" i="0" u="sng">
+                <a:solidFill>
+                  <a:srgbClr val="1368E5"/>
+                </a:solidFill>
+                <a:latin typeface="Calibri"/>
+                <a:hlinkClick r:id="rId3"/>
+              </a:rPr>
+              <a:t>short Python script</a:t>
+            </a:r>
+            <a:r>
+              <a:rPr sz="1350" b="0" i="0">
+                <a:solidFill>
+                  <a:srgbClr val="1F2937"/>
+                </a:solidFill>
+                <a:latin typeface="Calibri"/>
+              </a:rPr>
+              <a:t> that creates the table with proper column types and streams the file in. If a value had not fit its type the load would have failed, and it didn't, so that was my first check. The five routes are a tiny file, so they went into dbt as a </a:t>
+            </a:r>
+            <a:r>
+              <a:rPr sz="1350" b="0" i="0" u="sng">
+                <a:solidFill>
+                  <a:srgbClr val="1368E5"/>
+                </a:solidFill>
+                <a:latin typeface="Calibri"/>
+                <a:hlinkClick r:id="rId5"/>
+              </a:rPr>
+              <a:t>seed</a:t>
+            </a:r>
+            <a:r>
+              <a:rPr sz="1350" b="0" i="0">
+                <a:solidFill>
+                  <a:srgbClr val="1F2937"/>
+                </a:solidFill>
+                <a:latin typeface="Calibri"/>
+              </a:rPr>
+              <a:t>.</a:t>
             </a:r>
           </a:p>
           <a:p>
@@ -8399,7 +8692,45 @@
                 </a:solidFill>
                 <a:latin typeface="Calibri"/>
               </a:rPr>
-              <a:t>Everything downstream is a dbt model: a staging layer that cleans the data, an intermediate layer that spreads each event's hours across the months it was active, and the final tables that answer the questions.</a:t>
+              <a:t>Everything downstream is a dbt model: a </a:t>
+            </a:r>
+            <a:r>
+              <a:rPr sz="1350" b="0" i="0" u="sng">
+                <a:solidFill>
+                  <a:srgbClr val="1368E5"/>
+                </a:solidFill>
+                <a:latin typeface="Calibri"/>
+                <a:hlinkClick r:id="rId6"/>
+              </a:rPr>
+              <a:t>staging layer</a:t>
+            </a:r>
+            <a:r>
+              <a:rPr sz="1350" b="0" i="0">
+                <a:solidFill>
+                  <a:srgbClr val="1F2937"/>
+                </a:solidFill>
+                <a:latin typeface="Calibri"/>
+              </a:rPr>
+              <a:t> that cleans the data, an </a:t>
+            </a:r>
+            <a:r>
+              <a:rPr sz="1350" b="0" i="0" u="sng">
+                <a:solidFill>
+                  <a:srgbClr val="1368E5"/>
+                </a:solidFill>
+                <a:latin typeface="Calibri"/>
+                <a:hlinkClick r:id="rId7"/>
+              </a:rPr>
+              <a:t>intermediate layer</a:t>
+            </a:r>
+            <a:r>
+              <a:rPr sz="1350" b="0" i="0">
+                <a:solidFill>
+                  <a:srgbClr val="1F2937"/>
+                </a:solidFill>
+                <a:latin typeface="Calibri"/>
+              </a:rPr>
+              <a:t> that spreads each event's hours across the months it was active, and the final tables that answer the questions.</a:t>
             </a:r>
           </a:p>
         </p:txBody>
@@ -8867,8 +9198,8 @@
         </p:nvSpPr>
         <p:spPr>
           <a:xfrm>
-            <a:off x="8259775" y="6236208"/>
-            <a:ext cx="3383280" cy="502920"/>
+            <a:off x="6888175" y="6236208"/>
+            <a:ext cx="4754880" cy="502920"/>
           </a:xfrm>
           <a:prstGeom prst="rect">
             <a:avLst/>
@@ -8896,7 +9227,73 @@
                 </a:solidFill>
                 <a:latin typeface="Calibri"/>
               </a:rPr>
-              <a:t>Source: queries/10, queries/12  ·  data pulled 2026-10-26   ·   4</a:t>
+              <a:t>Source: </a:t>
+            </a:r>
+            <a:r>
+              <a:rPr sz="900" b="0" i="0" u="sng">
+                <a:solidFill>
+                  <a:srgbClr val="1368E5"/>
+                </a:solidFill>
+                <a:latin typeface="Calibri"/>
+                <a:hlinkClick r:id="rId3"/>
+              </a:rPr>
+              <a:t>query 10</a:t>
+            </a:r>
+            <a:r>
+              <a:rPr sz="900" b="0" i="0">
+                <a:solidFill>
+                  <a:srgbClr val="6B7B8C"/>
+                </a:solidFill>
+                <a:latin typeface="Calibri"/>
+              </a:rPr>
+              <a:t>, </a:t>
+            </a:r>
+            <a:r>
+              <a:rPr sz="900" b="0" i="0" u="sng">
+                <a:solidFill>
+                  <a:srgbClr val="1368E5"/>
+                </a:solidFill>
+                <a:latin typeface="Calibri"/>
+                <a:hlinkClick r:id="rId4"/>
+              </a:rPr>
+              <a:t>query 12</a:t>
+            </a:r>
+            <a:r>
+              <a:rPr sz="900" b="0" i="0">
+                <a:solidFill>
+                  <a:srgbClr val="6B7B8C"/>
+                </a:solidFill>
+                <a:latin typeface="Calibri"/>
+              </a:rPr>
+              <a:t>, </a:t>
+            </a:r>
+            <a:r>
+              <a:rPr sz="900" b="0" i="0" u="sng">
+                <a:solidFill>
+                  <a:srgbClr val="1368E5"/>
+                </a:solidFill>
+                <a:latin typeface="Calibri"/>
+                <a:hlinkClick r:id="rId5"/>
+              </a:rPr>
+              <a:t>data dictionary</a:t>
+            </a:r>
+            <a:r>
+              <a:rPr sz="900" b="0" i="0">
+                <a:solidFill>
+                  <a:srgbClr val="6B7B8C"/>
+                </a:solidFill>
+                <a:latin typeface="Calibri"/>
+              </a:rPr>
+              <a:t>   ·   data pulled 2026-10-26</a:t>
+            </a:r>
+            <a:r>
+              <a:rPr sz="900" b="0" i="0">
+                <a:solidFill>
+                  <a:srgbClr val="6B7B8C"/>
+                </a:solidFill>
+                <a:latin typeface="Calibri"/>
+              </a:rPr>
+              <a:t>   ·   4</a:t>
             </a:r>
           </a:p>
         </p:txBody>
@@ -9506,8 +9903,8 @@
         </p:nvSpPr>
         <p:spPr>
           <a:xfrm>
-            <a:off x="8259775" y="6236208"/>
-            <a:ext cx="3383280" cy="502920"/>
+            <a:off x="6888175" y="6236208"/>
+            <a:ext cx="4754880" cy="502920"/>
           </a:xfrm>
           <a:prstGeom prst="rect">
             <a:avLst/>
@@ -9535,7 +9932,54 @@
                 </a:solidFill>
                 <a:latin typeface="Calibri"/>
               </a:rPr>
-              <a:t>Source: stg_construction, queries/10  ·  data pulled 2026-10-26   ·   5</a:t>
+              <a:t>Source: </a:t>
+            </a:r>
+            <a:r>
+              <a:rPr sz="900" b="0" i="0" u="sng">
+                <a:solidFill>
+                  <a:srgbClr val="1368E5"/>
+                </a:solidFill>
+                <a:latin typeface="Calibri"/>
+                <a:hlinkClick r:id="rId3"/>
+              </a:rPr>
+              <a:t>staging model</a:t>
+            </a:r>
+            <a:r>
+              <a:rPr sz="900" b="0" i="0">
+                <a:solidFill>
+                  <a:srgbClr val="6B7B8C"/>
+                </a:solidFill>
+                <a:latin typeface="Calibri"/>
+              </a:rPr>
+              <a:t>, </a:t>
+            </a:r>
+            <a:r>
+              <a:rPr sz="900" b="0" i="0" u="sng">
+                <a:solidFill>
+                  <a:srgbClr val="1368E5"/>
+                </a:solidFill>
+                <a:latin typeface="Calibri"/>
+                <a:hlinkClick r:id="rId4"/>
+              </a:rPr>
+              <a:t>query 13</a:t>
+            </a:r>
+            <a:r>
+              <a:rPr sz="900" b="0" i="0">
+                <a:solidFill>
+                  <a:srgbClr val="6B7B8C"/>
+                </a:solidFill>
+                <a:latin typeface="Calibri"/>
+              </a:rPr>
+              <a:t>   ·   data pulled 2026-10-26</a:t>
+            </a:r>
+            <a:r>
+              <a:rPr sz="900" b="0" i="0">
+                <a:solidFill>
+                  <a:srgbClr val="6B7B8C"/>
+                </a:solidFill>
+                <a:latin typeface="Calibri"/>
+              </a:rPr>
+              <a:t>   ·   5</a:t>
             </a:r>
           </a:p>
         </p:txBody>
@@ -9549,7 +9993,7 @@
         <p:spPr>
           <a:xfrm>
             <a:off x="548640" y="1325880"/>
-            <a:ext cx="6766560" cy="3291840"/>
+            <a:ext cx="5120640" cy="4754880"/>
           </a:xfrm>
           <a:prstGeom prst="rect">
             <a:avLst/>
@@ -9571,13 +10015,32 @@
               </a:spcAft>
             </a:pPr>
             <a:r>
-              <a:rPr sz="1350" b="0" i="0">
+              <a:rPr sz="1300" b="0" i="0">
                 <a:solidFill>
                   <a:srgbClr val="1F2937"/>
                 </a:solidFill>
                 <a:latin typeface="Calibri"/>
               </a:rPr>
-              <a:t>Knowing this, I staged the data: deduped it, combined New York's boroughs into one city, and flagged the seasonal road closures, the events still open when the data was extracted, and the suspected administrative batch opens and closes. I flagged rather than deleted, so I could run any answer with or without them.</a:t>
+              <a:t>Knowing this, I </a:t>
+            </a:r>
+            <a:r>
+              <a:rPr sz="1300" b="0" i="0" u="sng">
+                <a:solidFill>
+                  <a:srgbClr val="1368E5"/>
+                </a:solidFill>
+                <a:latin typeface="Calibri"/>
+                <a:hlinkClick r:id="rId3"/>
+              </a:rPr>
+              <a:t>staged the data</a:t>
+            </a:r>
+            <a:r>
+              <a:rPr sz="1300" b="0" i="0">
+                <a:solidFill>
+                  <a:srgbClr val="1F2937"/>
+                </a:solidFill>
+                <a:latin typeface="Calibri"/>
+              </a:rPr>
+              <a:t>: deduped it, combined New York's boroughs into one city, and flagged the seasonal road closures, the events still open when the data was extracted, and the suspected administrative batch opens and closes. I flagged rather than deleted, so I could run any answer with or without them.</a:t>
             </a:r>
           </a:p>
           <a:p>
@@ -9590,13 +10053,13 @@
               </a:spcAft>
             </a:pPr>
             <a:r>
-              <a:rPr sz="1350" b="0" i="0">
+              <a:rPr sz="1300" b="0" i="0">
                 <a:solidFill>
                   <a:srgbClr val="1F2937"/>
                 </a:solidFill>
                 <a:latin typeface="Calibri"/>
               </a:rPr>
-              <a:t>In doing so I created a fun error. My first filter on the description field was too broad: it matched anything with “season” or “winter” in it, which pulled in things like Seasons Road and Winter Street. I had to refine it so my cleanup wasn't creating noise of its own.</a:t>
+              <a:t>In doing so I created a fun error. My first filter on the description field was too broad: it matched anything with “season” or “winter” in it, which pulled in things like Seasons Road and Winter Street, and a landmark on CA-108 called the Winter Closure Gate. I had to refine it so my cleanup wasn't creating noise of its own. The table shows what it caught.</a:t>
             </a:r>
           </a:p>
           <a:p>
@@ -9609,13 +10072,13 @@
               </a:spcAft>
             </a:pPr>
             <a:r>
-              <a:rPr sz="1350" b="0" i="0">
+              <a:rPr sz="1300" b="0" i="0">
                 <a:solidFill>
                   <a:srgbClr val="1F2937"/>
                 </a:solidFill>
                 <a:latin typeface="Calibri"/>
               </a:rPr>
-              <a:t>One thing the numbers told me at this point: the median event is 7 hours and the mean is about 400. The totals are carried by a long tail of multi-day events, not the typical one, so I show events and hours side by side from here on.</a:t>
+              <a:t>One thing the numbers told me at this point: the median event is 7 hours and the mean is about 400. The totals are carried by a long tail of multi-day events, not the typical one.</a:t>
             </a:r>
           </a:p>
         </p:txBody>
@@ -9629,8 +10092,8 @@
           <p:nvPr/>
         </p:nvGraphicFramePr>
         <p:xfrm>
-          <a:off x="7772400" y="1325880"/>
-          <a:ext cx="3840480" cy="2688336"/>
+          <a:off x="6126480" y="1325880"/>
+          <a:ext cx="5486400" cy="1975104"/>
         </p:xfrm>
         <a:graphic>
           <a:graphicData uri="http://schemas.openxmlformats.org/drawingml/2006/table">
@@ -9639,10 +10102,10 @@
                 <a:tableStyleId>{2D5ABB26-0587-4C30-8999-92F81FD0307C}</a:tableStyleId>
               </a:tblPr>
               <a:tblGrid>
-                <a:gridCol w="1737360"/>
-                <a:gridCol w="2103120"/>
+                <a:gridCol w="4846320"/>
+                <a:gridCol w="640080"/>
               </a:tblGrid>
-              <a:tr h="384048">
+              <a:tr h="329184">
                 <a:tc>
                   <a:txBody>
                     <a:bodyPr wrap="square"/>
@@ -9650,13 +10113,13 @@
                     <a:p>
                       <a:pPr algn="l"/>
                       <a:r>
-                        <a:rPr sz="1100" b="1">
+                        <a:rPr sz="1000" b="1">
                           <a:solidFill>
                             <a:srgbClr val="6B7B8C"/>
                           </a:solidFill>
                           <a:latin typeface="Calibri"/>
                         </a:rPr>
-                        <a:t>Rule</a:t>
+                        <a:t>Caught by the first filter, not a closure</a:t>
                       </a:r>
                     </a:p>
                   </a:txBody>
@@ -9676,15 +10139,15 @@
                     <a:bodyPr wrap="square"/>
                     <a:lstStyle/>
                     <a:p>
-                      <a:pPr algn="l"/>
-                      <a:r>
-                        <a:rPr sz="1100" b="1">
+                      <a:pPr algn="r"/>
+                      <a:r>
+                        <a:rPr sz="1000" b="1">
                           <a:solidFill>
                             <a:srgbClr val="6B7B8C"/>
                           </a:solidFill>
                           <a:latin typeface="Calibri"/>
                         </a:rPr>
-                        <a:t>What it does</a:t>
+                        <a:t>events</a:t>
                       </a:r>
                     </a:p>
                   </a:txBody>
@@ -9700,7 +10163,7 @@
                   </a:tcPr>
                 </a:tc>
               </a:tr>
-              <a:tr h="384048">
+              <a:tr h="329184">
                 <a:tc>
                   <a:txBody>
                     <a:bodyPr wrap="square"/>
@@ -9708,22 +10171,47 @@
                     <a:p>
                       <a:pPr algn="l"/>
                       <a:r>
-                        <a:rPr sz="1100" b="0">
-                          <a:solidFill>
-                            <a:srgbClr val="1F2937"/>
-                          </a:solidFill>
-                          <a:latin typeface="Calibri"/>
-                        </a:rPr>
-                        <a:t>dedup</a:t>
-                      </a:r>
-                    </a:p>
-                  </a:txBody>
-                  <a:tcPr marL="73152" marR="73152" marT="27432" marB="27432" anchor="ctr">
-                    <a:solidFill>
-                      <a:srgbClr val="FFFFFF"/>
-                    </a:solidFill>
-                  </a:tcPr>
-                </a:tc>
+                        <a:rPr sz="950" b="0">
+                          <a:solidFill>
+                            <a:srgbClr val="1F2937"/>
+                          </a:solidFill>
+                          <a:latin typeface="Calibri"/>
+                        </a:rPr>
+                        <a:t>Slow traffic on 2nd Lt. David E. Rylander Memorial Highway - OH-8 S from Seasons Rd (OH-</a:t>
+                      </a:r>
+                    </a:p>
+                  </a:txBody>
+                  <a:tcPr marL="73152" marR="73152" marT="27432" marB="27432" anchor="ctr">
+                    <a:solidFill>
+                      <a:srgbClr val="FFFFFF"/>
+                    </a:solidFill>
+                  </a:tcPr>
+                </a:tc>
+                <a:tc>
+                  <a:txBody>
+                    <a:bodyPr wrap="square"/>
+                    <a:lstStyle/>
+                    <a:p>
+                      <a:pPr algn="r"/>
+                      <a:r>
+                        <a:rPr sz="950" b="0">
+                          <a:solidFill>
+                            <a:srgbClr val="1F2937"/>
+                          </a:solidFill>
+                          <a:latin typeface="Calibri"/>
+                        </a:rPr>
+                        <a:t>153</a:t>
+                      </a:r>
+                    </a:p>
+                  </a:txBody>
+                  <a:tcPr marL="73152" marR="73152" marT="27432" marB="27432" anchor="ctr">
+                    <a:solidFill>
+                      <a:srgbClr val="FFFFFF"/>
+                    </a:solidFill>
+                  </a:tcPr>
+                </a:tc>
+              </a:tr>
+              <a:tr h="329184">
                 <a:tc>
                   <a:txBody>
                     <a:bodyPr wrap="square"/>
@@ -9731,13 +10219,36 @@
                     <a:p>
                       <a:pPr algn="l"/>
                       <a:r>
-                        <a:rPr sz="1100" b="0">
-                          <a:solidFill>
-                            <a:srgbClr val="1F2937"/>
-                          </a:solidFill>
-                          <a:latin typeface="Calibri"/>
-                        </a:rPr>
-                        <a:t>one row per start, end, location and description</a:t>
+                        <a:rPr sz="950" b="0">
+                          <a:solidFill>
+                            <a:srgbClr val="1F2937"/>
+                          </a:solidFill>
+                          <a:latin typeface="Calibri"/>
+                        </a:rPr>
+                        <a:t>Slow traffic on 2nd Lt. David E. Rylander Memorial Highway - OH-8 S from Seasons Rd (OH-</a:t>
+                      </a:r>
+                    </a:p>
+                  </a:txBody>
+                  <a:tcPr marL="73152" marR="73152" marT="27432" marB="27432" anchor="ctr">
+                    <a:solidFill>
+                      <a:srgbClr val="FFFFFF"/>
+                    </a:solidFill>
+                  </a:tcPr>
+                </a:tc>
+                <a:tc>
+                  <a:txBody>
+                    <a:bodyPr wrap="square"/>
+                    <a:lstStyle/>
+                    <a:p>
+                      <a:pPr algn="r"/>
+                      <a:r>
+                        <a:rPr sz="950" b="0">
+                          <a:solidFill>
+                            <a:srgbClr val="1F2937"/>
+                          </a:solidFill>
+                          <a:latin typeface="Calibri"/>
+                        </a:rPr>
+                        <a:t>149</a:t>
                       </a:r>
                     </a:p>
                   </a:txBody>
@@ -9748,7 +10259,7 @@
                   </a:tcPr>
                 </a:tc>
               </a:tr>
-              <a:tr h="384048">
+              <a:tr h="329184">
                 <a:tc>
                   <a:txBody>
                     <a:bodyPr wrap="square"/>
@@ -9756,22 +10267,47 @@
                     <a:p>
                       <a:pPr algn="l"/>
                       <a:r>
-                        <a:rPr sz="1100" b="0">
-                          <a:solidFill>
-                            <a:srgbClr val="1F2937"/>
-                          </a:solidFill>
-                          <a:latin typeface="Calibri"/>
-                        </a:rPr>
-                        <a:t>city_normalized</a:t>
-                      </a:r>
-                    </a:p>
-                  </a:txBody>
-                  <a:tcPr marL="73152" marR="73152" marT="27432" marB="27432" anchor="ctr">
-                    <a:solidFill>
-                      <a:srgbClr val="FFFFFF"/>
-                    </a:solidFill>
-                  </a:tcPr>
-                </a:tc>
+                        <a:rPr sz="950" b="0">
+                          <a:solidFill>
+                            <a:srgbClr val="1F2937"/>
+                          </a:solidFill>
+                          <a:latin typeface="Calibri"/>
+                        </a:rPr>
+                        <a:t>Stationary traffic on US-4 N - US-4 S from CR-74/Winter St (N Greenbush Rd/US-4) to NY-1</a:t>
+                      </a:r>
+                    </a:p>
+                  </a:txBody>
+                  <a:tcPr marL="73152" marR="73152" marT="27432" marB="27432" anchor="ctr">
+                    <a:solidFill>
+                      <a:srgbClr val="FFFFFF"/>
+                    </a:solidFill>
+                  </a:tcPr>
+                </a:tc>
+                <a:tc>
+                  <a:txBody>
+                    <a:bodyPr wrap="square"/>
+                    <a:lstStyle/>
+                    <a:p>
+                      <a:pPr algn="r"/>
+                      <a:r>
+                        <a:rPr sz="950" b="0">
+                          <a:solidFill>
+                            <a:srgbClr val="1F2937"/>
+                          </a:solidFill>
+                          <a:latin typeface="Calibri"/>
+                        </a:rPr>
+                        <a:t>87</a:t>
+                      </a:r>
+                    </a:p>
+                  </a:txBody>
+                  <a:tcPr marL="73152" marR="73152" marT="27432" marB="27432" anchor="ctr">
+                    <a:solidFill>
+                      <a:srgbClr val="FFFFFF"/>
+                    </a:solidFill>
+                  </a:tcPr>
+                </a:tc>
+              </a:tr>
+              <a:tr h="329184">
                 <a:tc>
                   <a:txBody>
                     <a:bodyPr wrap="square"/>
@@ -9779,13 +10315,36 @@
                     <a:p>
                       <a:pPr algn="l"/>
                       <a:r>
-                        <a:rPr sz="1100" b="0">
-                          <a:solidFill>
-                            <a:srgbClr val="1F2937"/>
-                          </a:solidFill>
-                          <a:latin typeface="Calibri"/>
-                        </a:rPr>
-                        <a:t>the five boroughs become New York</a:t>
+                        <a:rPr sz="950" b="0">
+                          <a:solidFill>
+                            <a:srgbClr val="1F2937"/>
+                          </a:solidFill>
+                          <a:latin typeface="Calibri"/>
+                        </a:rPr>
+                        <a:t>Slow traffic on OH-8 S from I-80/Ohio Tpke (OH-8) to Seasons Rd (OH-8) due to roadwork.</a:t>
+                      </a:r>
+                    </a:p>
+                  </a:txBody>
+                  <a:tcPr marL="73152" marR="73152" marT="27432" marB="27432" anchor="ctr">
+                    <a:solidFill>
+                      <a:srgbClr val="FFFFFF"/>
+                    </a:solidFill>
+                  </a:tcPr>
+                </a:tc>
+                <a:tc>
+                  <a:txBody>
+                    <a:bodyPr wrap="square"/>
+                    <a:lstStyle/>
+                    <a:p>
+                      <a:pPr algn="r"/>
+                      <a:r>
+                        <a:rPr sz="950" b="0">
+                          <a:solidFill>
+                            <a:srgbClr val="1F2937"/>
+                          </a:solidFill>
+                          <a:latin typeface="Calibri"/>
+                        </a:rPr>
+                        <a:t>87</a:t>
                       </a:r>
                     </a:p>
                   </a:txBody>
@@ -9796,7 +10355,7 @@
                   </a:tcPr>
                 </a:tc>
               </a:tr>
-              <a:tr h="384048">
+              <a:tr h="329184">
                 <a:tc>
                   <a:txBody>
                     <a:bodyPr wrap="square"/>
@@ -9804,180 +10363,36 @@
                     <a:p>
                       <a:pPr algn="l"/>
                       <a:r>
-                        <a:rPr sz="1100" b="0">
-                          <a:solidFill>
-                            <a:srgbClr val="1F2937"/>
-                          </a:solidFill>
-                          <a:latin typeface="Calibri"/>
-                        </a:rPr>
-                        <a:t>event_type</a:t>
-                      </a:r>
-                    </a:p>
-                  </a:txBody>
-                  <a:tcPr marL="73152" marR="73152" marT="27432" marB="27432" anchor="ctr">
-                    <a:solidFill>
-                      <a:srgbClr val="FFFFFF"/>
-                    </a:solidFill>
-                  </a:tcPr>
-                </a:tc>
-                <a:tc>
-                  <a:txBody>
-                    <a:bodyPr wrap="square"/>
-                    <a:lstStyle/>
-                    <a:p>
-                      <a:pPr algn="l"/>
-                      <a:r>
-                        <a:rPr sz="1100" b="0">
-                          <a:solidFill>
-                            <a:srgbClr val="1F2937"/>
-                          </a:solidFill>
-                          <a:latin typeface="Calibri"/>
-                        </a:rPr>
-                        <a:t>seasonal closure or construction</a:t>
-                      </a:r>
-                    </a:p>
-                  </a:txBody>
-                  <a:tcPr marL="73152" marR="73152" marT="27432" marB="27432" anchor="ctr">
-                    <a:solidFill>
-                      <a:srgbClr val="FFFFFF"/>
-                    </a:solidFill>
-                  </a:tcPr>
-                </a:tc>
-              </a:tr>
-              <a:tr h="384048">
-                <a:tc>
-                  <a:txBody>
-                    <a:bodyPr wrap="square"/>
-                    <a:lstStyle/>
-                    <a:p>
-                      <a:pPr algn="l"/>
-                      <a:r>
-                        <a:rPr sz="1100" b="0">
-                          <a:solidFill>
-                            <a:srgbClr val="1F2937"/>
-                          </a:solidFill>
-                          <a:latin typeface="Calibri"/>
-                        </a:rPr>
-                        <a:t>is_batch_start / end</a:t>
-                      </a:r>
-                    </a:p>
-                  </a:txBody>
-                  <a:tcPr marL="73152" marR="73152" marT="27432" marB="27432" anchor="ctr">
-                    <a:solidFill>
-                      <a:srgbClr val="FFFFFF"/>
-                    </a:solidFill>
-                  </a:tcPr>
-                </a:tc>
-                <a:tc>
-                  <a:txBody>
-                    <a:bodyPr wrap="square"/>
-                    <a:lstStyle/>
-                    <a:p>
-                      <a:pPr algn="l"/>
-                      <a:r>
-                        <a:rPr sz="1100" b="0">
-                          <a:solidFill>
-                            <a:srgbClr val="1F2937"/>
-                          </a:solidFill>
-                          <a:latin typeface="Calibri"/>
-                        </a:rPr>
-                        <a:t>timestamp shared by 100+ rows</a:t>
-                      </a:r>
-                    </a:p>
-                  </a:txBody>
-                  <a:tcPr marL="73152" marR="73152" marT="27432" marB="27432" anchor="ctr">
-                    <a:solidFill>
-                      <a:srgbClr val="FFFFFF"/>
-                    </a:solidFill>
-                  </a:tcPr>
-                </a:tc>
-              </a:tr>
-              <a:tr h="384048">
-                <a:tc>
-                  <a:txBody>
-                    <a:bodyPr wrap="square"/>
-                    <a:lstStyle/>
-                    <a:p>
-                      <a:pPr algn="l"/>
-                      <a:r>
-                        <a:rPr sz="1100" b="0">
-                          <a:solidFill>
-                            <a:srgbClr val="1F2937"/>
-                          </a:solidFill>
-                          <a:latin typeface="Calibri"/>
-                        </a:rPr>
-                        <a:t>is_open_at_extract</a:t>
-                      </a:r>
-                    </a:p>
-                  </a:txBody>
-                  <a:tcPr marL="73152" marR="73152" marT="27432" marB="27432" anchor="ctr">
-                    <a:solidFill>
-                      <a:srgbClr val="FFFFFF"/>
-                    </a:solidFill>
-                  </a:tcPr>
-                </a:tc>
-                <a:tc>
-                  <a:txBody>
-                    <a:bodyPr wrap="square"/>
-                    <a:lstStyle/>
-                    <a:p>
-                      <a:pPr algn="l"/>
-                      <a:r>
-                        <a:rPr sz="1100" b="0">
-                          <a:solidFill>
-                            <a:srgbClr val="1F2937"/>
-                          </a:solidFill>
-                          <a:latin typeface="Calibri"/>
-                        </a:rPr>
-                        <a:t>end time is the extract date</a:t>
-                      </a:r>
-                    </a:p>
-                  </a:txBody>
-                  <a:tcPr marL="73152" marR="73152" marT="27432" marB="27432" anchor="ctr">
-                    <a:solidFill>
-                      <a:srgbClr val="FFFFFF"/>
-                    </a:solidFill>
-                  </a:tcPr>
-                </a:tc>
-              </a:tr>
-              <a:tr h="384048">
-                <a:tc>
-                  <a:txBody>
-                    <a:bodyPr wrap="square"/>
-                    <a:lstStyle/>
-                    <a:p>
-                      <a:pPr algn="l"/>
-                      <a:r>
-                        <a:rPr sz="1100" b="0">
-                          <a:solidFill>
-                            <a:srgbClr val="1F2937"/>
-                          </a:solidFill>
-                          <a:latin typeface="Calibri"/>
-                        </a:rPr>
-                        <a:t>duration_hours</a:t>
-                      </a:r>
-                    </a:p>
-                  </a:txBody>
-                  <a:tcPr marL="73152" marR="73152" marT="27432" marB="27432" anchor="ctr">
-                    <a:solidFill>
-                      <a:srgbClr val="FFFFFF"/>
-                    </a:solidFill>
-                  </a:tcPr>
-                </a:tc>
-                <a:tc>
-                  <a:txBody>
-                    <a:bodyPr wrap="square"/>
-                    <a:lstStyle/>
-                    <a:p>
-                      <a:pPr algn="l"/>
-                      <a:r>
-                        <a:rPr sz="1100" b="0">
-                          <a:solidFill>
-                            <a:srgbClr val="1F2937"/>
-                          </a:solidFill>
-                          <a:latin typeface="Calibri"/>
-                        </a:rPr>
-                        <a:t>end minus start</a:t>
+                        <a:rPr sz="950" b="0">
+                          <a:solidFill>
+                            <a:srgbClr val="1F2937"/>
+                          </a:solidFill>
+                          <a:latin typeface="Calibri"/>
+                        </a:rPr>
+                        <a:t>Stationary traffic on FL-540 - County Hwy-540 from Thornhill Rd (Winter Lake Rd/FL-540) </a:t>
+                      </a:r>
+                    </a:p>
+                  </a:txBody>
+                  <a:tcPr marL="73152" marR="73152" marT="27432" marB="27432" anchor="ctr">
+                    <a:solidFill>
+                      <a:srgbClr val="FFFFFF"/>
+                    </a:solidFill>
+                  </a:tcPr>
+                </a:tc>
+                <a:tc>
+                  <a:txBody>
+                    <a:bodyPr wrap="square"/>
+                    <a:lstStyle/>
+                    <a:p>
+                      <a:pPr algn="r"/>
+                      <a:r>
+                        <a:rPr sz="950" b="0">
+                          <a:solidFill>
+                            <a:srgbClr val="1F2937"/>
+                          </a:solidFill>
+                          <a:latin typeface="Calibri"/>
+                        </a:rPr>
+                        <a:t>83</a:t>
                       </a:r>
                     </a:p>
                   </a:txBody>
@@ -9992,48 +10407,282 @@
           </a:graphicData>
         </a:graphic>
       </p:graphicFrame>
-      <p:sp>
-        <p:nvSpPr>
-          <p:cNvPr id="8" name="TextBox 7"/>
-          <p:cNvSpPr txBox="1"/>
+      <p:graphicFrame>
+        <p:nvGraphicFramePr>
+          <p:cNvPr id="8" name="Table 7"/>
+          <p:cNvGraphicFramePr>
+            <a:graphicFrameLocks noGrp="1"/>
+          </p:cNvGraphicFramePr>
           <p:nvPr/>
-        </p:nvSpPr>
-        <p:spPr>
-          <a:xfrm>
-            <a:off x="7772400" y="4087368"/>
-            <a:ext cx="3840480" cy="320040"/>
-          </a:xfrm>
-          <a:prstGeom prst="rect">
-            <a:avLst/>
-          </a:prstGeom>
-          <a:noFill/>
-        </p:spPr>
-        <p:txBody>
-          <a:bodyPr wrap="square" lIns="0" rIns="0" tIns="0" bIns="0" anchor="t">
-            <a:spAutoFit/>
-          </a:bodyPr>
-          <a:lstStyle/>
-          <a:p>
-            <a:pPr algn="l">
-              <a:lnSpc>
-                <a:spcPct val="110000"/>
-              </a:lnSpc>
-              <a:spcAft>
-                <a:spcPts val="400"/>
-              </a:spcAft>
-            </a:pPr>
-            <a:r>
-              <a:rPr sz="1000" b="0" i="0">
-                <a:solidFill>
-                  <a:srgbClr val="6B7B8C"/>
-                </a:solidFill>
-                <a:latin typeface="Calibri"/>
-              </a:rPr>
-              <a:t>Tests: unique on the dedup key, not null on time, city and state, severity in 1–4, start before end.</a:t>
-            </a:r>
-          </a:p>
-        </p:txBody>
-      </p:sp>
+        </p:nvGraphicFramePr>
+        <p:xfrm>
+          <a:off x="6126480" y="3483864"/>
+          <a:ext cx="5486400" cy="1645920"/>
+        </p:xfrm>
+        <a:graphic>
+          <a:graphicData uri="http://schemas.openxmlformats.org/drawingml/2006/table">
+            <a:tbl>
+              <a:tblPr>
+                <a:tableStyleId>{2D5ABB26-0587-4C30-8999-92F81FD0307C}</a:tableStyleId>
+              </a:tblPr>
+              <a:tblGrid>
+                <a:gridCol w="4846320"/>
+                <a:gridCol w="640080"/>
+              </a:tblGrid>
+              <a:tr h="329184">
+                <a:tc>
+                  <a:txBody>
+                    <a:bodyPr wrap="square"/>
+                    <a:lstStyle/>
+                    <a:p>
+                      <a:pPr algn="l"/>
+                      <a:r>
+                        <a:rPr sz="1000" b="1">
+                          <a:solidFill>
+                            <a:srgbClr val="6B7B8C"/>
+                          </a:solidFill>
+                          <a:latin typeface="Calibri"/>
+                        </a:rPr>
+                        <a:t>Real seasonal closures, kept flagged</a:t>
+                      </a:r>
+                    </a:p>
+                  </a:txBody>
+                  <a:tcPr marL="73152" marR="73152" marT="27432" marB="27432" anchor="ctr">
+                    <a:solidFill>
+                      <a:srgbClr val="F1F4F8"/>
+                    </a:solidFill>
+                    <a:lnB w="12700">
+                      <a:solidFill>
+                        <a:srgbClr val="DCE3EA"/>
+                      </a:solidFill>
+                    </a:lnB>
+                  </a:tcPr>
+                </a:tc>
+                <a:tc>
+                  <a:txBody>
+                    <a:bodyPr wrap="square"/>
+                    <a:lstStyle/>
+                    <a:p>
+                      <a:pPr algn="r"/>
+                      <a:r>
+                        <a:rPr sz="1000" b="1">
+                          <a:solidFill>
+                            <a:srgbClr val="6B7B8C"/>
+                          </a:solidFill>
+                          <a:latin typeface="Calibri"/>
+                        </a:rPr>
+                        <a:t>events</a:t>
+                      </a:r>
+                    </a:p>
+                  </a:txBody>
+                  <a:tcPr marL="73152" marR="73152" marT="27432" marB="27432" anchor="ctr">
+                    <a:solidFill>
+                      <a:srgbClr val="F1F4F8"/>
+                    </a:solidFill>
+                    <a:lnB w="12700">
+                      <a:solidFill>
+                        <a:srgbClr val="DCE3EA"/>
+                      </a:solidFill>
+                    </a:lnB>
+                  </a:tcPr>
+                </a:tc>
+              </a:tr>
+              <a:tr h="329184">
+                <a:tc>
+                  <a:txBody>
+                    <a:bodyPr wrap="square"/>
+                    <a:lstStyle/>
+                    <a:p>
+                      <a:pPr algn="l"/>
+                      <a:r>
+                        <a:rPr sz="950" b="0">
+                          <a:solidFill>
+                            <a:srgbClr val="1F2937"/>
+                          </a:solidFill>
+                          <a:latin typeface="Calibri"/>
+                        </a:rPr>
+                        <a:t>Closed between NF-1012/Cold Springs Cutoff Rd and OR-126 - Closed. Traffic problem. wint</a:t>
+                      </a:r>
+                    </a:p>
+                  </a:txBody>
+                  <a:tcPr marL="73152" marR="73152" marT="27432" marB="27432" anchor="ctr">
+                    <a:solidFill>
+                      <a:srgbClr val="FFFFFF"/>
+                    </a:solidFill>
+                  </a:tcPr>
+                </a:tc>
+                <a:tc>
+                  <a:txBody>
+                    <a:bodyPr wrap="square"/>
+                    <a:lstStyle/>
+                    <a:p>
+                      <a:pPr algn="r"/>
+                      <a:r>
+                        <a:rPr sz="950" b="0">
+                          <a:solidFill>
+                            <a:srgbClr val="1F2937"/>
+                          </a:solidFill>
+                          <a:latin typeface="Calibri"/>
+                        </a:rPr>
+                        <a:t>64</a:t>
+                      </a:r>
+                    </a:p>
+                  </a:txBody>
+                  <a:tcPr marL="73152" marR="73152" marT="27432" marB="27432" anchor="ctr">
+                    <a:solidFill>
+                      <a:srgbClr val="FFFFFF"/>
+                    </a:solidFill>
+                  </a:tcPr>
+                </a:tc>
+              </a:tr>
+              <a:tr h="329184">
+                <a:tc>
+                  <a:txBody>
+                    <a:bodyPr wrap="square"/>
+                    <a:lstStyle/>
+                    <a:p>
+                      <a:pPr algn="l"/>
+                      <a:r>
+                        <a:rPr sz="950" b="0">
+                          <a:solidFill>
+                            <a:srgbClr val="1F2937"/>
+                          </a:solidFill>
+                          <a:latin typeface="Calibri"/>
+                        </a:rPr>
+                        <a:t>Closed between OR-126 and NF-1012/Cold Springs Cutoff Rd - Closed. Traffic problem. wint</a:t>
+                      </a:r>
+                    </a:p>
+                  </a:txBody>
+                  <a:tcPr marL="73152" marR="73152" marT="27432" marB="27432" anchor="ctr">
+                    <a:solidFill>
+                      <a:srgbClr val="FFFFFF"/>
+                    </a:solidFill>
+                  </a:tcPr>
+                </a:tc>
+                <a:tc>
+                  <a:txBody>
+                    <a:bodyPr wrap="square"/>
+                    <a:lstStyle/>
+                    <a:p>
+                      <a:pPr algn="r"/>
+                      <a:r>
+                        <a:rPr sz="950" b="0">
+                          <a:solidFill>
+                            <a:srgbClr val="1F2937"/>
+                          </a:solidFill>
+                          <a:latin typeface="Calibri"/>
+                        </a:rPr>
+                        <a:t>63</a:t>
+                      </a:r>
+                    </a:p>
+                  </a:txBody>
+                  <a:tcPr marL="73152" marR="73152" marT="27432" marB="27432" anchor="ctr">
+                    <a:solidFill>
+                      <a:srgbClr val="FFFFFF"/>
+                    </a:solidFill>
+                  </a:tcPr>
+                </a:tc>
+              </a:tr>
+              <a:tr h="329184">
+                <a:tc>
+                  <a:txBody>
+                    <a:bodyPr wrap="square"/>
+                    <a:lstStyle/>
+                    <a:p>
+                      <a:pPr algn="l"/>
+                      <a:r>
+                        <a:rPr sz="950" b="0">
+                          <a:solidFill>
+                            <a:srgbClr val="1F2937"/>
+                          </a:solidFill>
+                          <a:latin typeface="Calibri"/>
+                        </a:rPr>
+                        <a:t>Closed between CA-207/Mt Reba Rd and CA-89 - Closed. Snowfall. winter closure.</a:t>
+                      </a:r>
+                    </a:p>
+                  </a:txBody>
+                  <a:tcPr marL="73152" marR="73152" marT="27432" marB="27432" anchor="ctr">
+                    <a:solidFill>
+                      <a:srgbClr val="FFFFFF"/>
+                    </a:solidFill>
+                  </a:tcPr>
+                </a:tc>
+                <a:tc>
+                  <a:txBody>
+                    <a:bodyPr wrap="square"/>
+                    <a:lstStyle/>
+                    <a:p>
+                      <a:pPr algn="r"/>
+                      <a:r>
+                        <a:rPr sz="950" b="0">
+                          <a:solidFill>
+                            <a:srgbClr val="1F2937"/>
+                          </a:solidFill>
+                          <a:latin typeface="Calibri"/>
+                        </a:rPr>
+                        <a:t>57</a:t>
+                      </a:r>
+                    </a:p>
+                  </a:txBody>
+                  <a:tcPr marL="73152" marR="73152" marT="27432" marB="27432" anchor="ctr">
+                    <a:solidFill>
+                      <a:srgbClr val="FFFFFF"/>
+                    </a:solidFill>
+                  </a:tcPr>
+                </a:tc>
+              </a:tr>
+              <a:tr h="329184">
+                <a:tc>
+                  <a:txBody>
+                    <a:bodyPr wrap="square"/>
+                    <a:lstStyle/>
+                    <a:p>
+                      <a:pPr algn="l"/>
+                      <a:r>
+                        <a:rPr sz="950" b="0">
+                          <a:solidFill>
+                            <a:srgbClr val="1F2937"/>
+                          </a:solidFill>
+                          <a:latin typeface="Calibri"/>
+                        </a:rPr>
+                        <a:t>Closed between 1st St and CO-133 - Closed. winter closure.</a:t>
+                      </a:r>
+                    </a:p>
+                  </a:txBody>
+                  <a:tcPr marL="73152" marR="73152" marT="27432" marB="27432" anchor="ctr">
+                    <a:solidFill>
+                      <a:srgbClr val="FFFFFF"/>
+                    </a:solidFill>
+                  </a:tcPr>
+                </a:tc>
+                <a:tc>
+                  <a:txBody>
+                    <a:bodyPr wrap="square"/>
+                    <a:lstStyle/>
+                    <a:p>
+                      <a:pPr algn="r"/>
+                      <a:r>
+                        <a:rPr sz="950" b="0">
+                          <a:solidFill>
+                            <a:srgbClr val="1F2937"/>
+                          </a:solidFill>
+                          <a:latin typeface="Calibri"/>
+                        </a:rPr>
+                        <a:t>48</a:t>
+                      </a:r>
+                    </a:p>
+                  </a:txBody>
+                  <a:tcPr marL="73152" marR="73152" marT="27432" marB="27432" anchor="ctr">
+                    <a:solidFill>
+                      <a:srgbClr val="FFFFFF"/>
+                    </a:solidFill>
+                  </a:tcPr>
+                </a:tc>
+              </a:tr>
+            </a:tbl>
+          </a:graphicData>
+        </a:graphic>
+      </p:graphicFrame>
     </p:spTree>
   </p:cSld>
   <p:clrMapOvr>
@@ -10089,7 +10738,7 @@
                 </a:solidFill>
                 <a:latin typeface="Calibri"/>
               </a:rPr>
-              <a:t>Q1: which city had the most construction hours</a:t>
+              <a:t>Question 1: over the past five years, which city has had the most hours of construction?</a:t>
             </a:r>
           </a:p>
         </p:txBody>
@@ -10161,8 +10810,8 @@
         </p:nvSpPr>
         <p:spPr>
           <a:xfrm>
-            <a:off x="8259775" y="6236208"/>
-            <a:ext cx="3383280" cy="502920"/>
+            <a:off x="6888175" y="6236208"/>
+            <a:ext cx="4754880" cy="502920"/>
           </a:xfrm>
           <a:prstGeom prst="rect">
             <a:avLst/>
@@ -10190,7 +10839,54 @@
                 </a:solidFill>
                 <a:latin typeface="Calibri"/>
               </a:rPr>
-              <a:t>Source: queries/01, int_city_month_hours  ·  data pulled 2026-10-26   ·   6</a:t>
+              <a:t>Source: </a:t>
+            </a:r>
+            <a:r>
+              <a:rPr sz="900" b="0" i="0" u="sng">
+                <a:solidFill>
+                  <a:srgbClr val="1368E5"/>
+                </a:solidFill>
+                <a:latin typeface="Calibri"/>
+                <a:hlinkClick r:id="rId3"/>
+              </a:rPr>
+              <a:t>query 1</a:t>
+            </a:r>
+            <a:r>
+              <a:rPr sz="900" b="0" i="0">
+                <a:solidFill>
+                  <a:srgbClr val="6B7B8C"/>
+                </a:solidFill>
+                <a:latin typeface="Calibri"/>
+              </a:rPr>
+              <a:t>, </a:t>
+            </a:r>
+            <a:r>
+              <a:rPr sz="900" b="0" i="0" u="sng">
+                <a:solidFill>
+                  <a:srgbClr val="1368E5"/>
+                </a:solidFill>
+                <a:latin typeface="Calibri"/>
+                <a:hlinkClick r:id="rId4"/>
+              </a:rPr>
+              <a:t>int_city_month_hours</a:t>
+            </a:r>
+            <a:r>
+              <a:rPr sz="900" b="0" i="0">
+                <a:solidFill>
+                  <a:srgbClr val="6B7B8C"/>
+                </a:solidFill>
+                <a:latin typeface="Calibri"/>
+              </a:rPr>
+              <a:t>   ·   data pulled 2026-10-26</a:t>
+            </a:r>
+            <a:r>
+              <a:rPr sz="900" b="0" i="0">
+                <a:solidFill>
+                  <a:srgbClr val="6B7B8C"/>
+                </a:solidFill>
+                <a:latin typeface="Calibri"/>
+              </a:rPr>
+              <a:t>   ·   6</a:t>
             </a:r>
           </a:p>
         </p:txBody>
@@ -10204,7 +10900,7 @@
           <p:nvPr/>
         </p:nvPicPr>
         <p:blipFill>
-          <a:blip r:embed="rId3"/>
+          <a:blip r:embed="rId5"/>
           <a:stretch>
             <a:fillRect/>
           </a:stretch>
@@ -10212,7 +10908,7 @@
         <p:spPr>
           <a:xfrm>
             <a:off x="548640" y="1280160"/>
-            <a:ext cx="7223760" cy="2912346"/>
+            <a:ext cx="7223760" cy="3752125"/>
           </a:xfrm>
           <a:prstGeom prst="rect">
             <a:avLst/>
@@ -10227,7 +10923,7 @@
         </p:nvSpPr>
         <p:spPr>
           <a:xfrm>
-            <a:off x="548640" y="4343400"/>
+            <a:off x="548640" y="5257800"/>
             <a:ext cx="7223760" cy="320040"/>
           </a:xfrm>
           <a:prstGeom prst="rect">
@@ -10298,7 +10994,7 @@
                 </a:solidFill>
                 <a:latin typeface="Calibri"/>
               </a:rPr>
-              <a:t>Once the data was staged I could actually dig into the questions. The first was which city has had the most construction over the past five years.</a:t>
+              <a:t>Once the data was staged I could actually dig into the questions.</a:t>
             </a:r>
           </a:p>
           <a:p>
@@ -10396,7 +11092,7 @@
                 </a:solidFill>
                 <a:latin typeface="Calibri"/>
               </a:rPr>
-              <a:t>Q2: before going further, why does the list look like this</a:t>
+              <a:t>Question 2: how has this changed over time? (1 of 2: the ten cities above)</a:t>
             </a:r>
           </a:p>
         </p:txBody>
@@ -10468,8 +11164,8 @@
         </p:nvSpPr>
         <p:spPr>
           <a:xfrm>
-            <a:off x="8259775" y="6236208"/>
-            <a:ext cx="3383280" cy="502920"/>
+            <a:off x="6888175" y="6236208"/>
+            <a:ext cx="4754880" cy="502920"/>
           </a:xfrm>
           <a:prstGeom prst="rect">
             <a:avLst/>
@@ -10497,7 +11193,35 @@
                 </a:solidFill>
                 <a:latin typeface="Calibri"/>
               </a:rPr>
-              <a:t>Source: queries/03, int_city_month_hours  ·  data pulled 2026-10-26   ·   7</a:t>
+              <a:t>Source: </a:t>
+            </a:r>
+            <a:r>
+              <a:rPr sz="900" b="0" i="0" u="sng">
+                <a:solidFill>
+                  <a:srgbClr val="1368E5"/>
+                </a:solidFill>
+                <a:latin typeface="Calibri"/>
+                <a:hlinkClick r:id="rId3"/>
+              </a:rPr>
+              <a:t>query 3</a:t>
+            </a:r>
+            <a:r>
+              <a:rPr sz="900" b="0" i="0">
+                <a:solidFill>
+                  <a:srgbClr val="6B7B8C"/>
+                </a:solidFill>
+                <a:latin typeface="Calibri"/>
+              </a:rPr>
+              <a:t>   ·   data pulled 2026-10-26</a:t>
+            </a:r>
+            <a:r>
+              <a:rPr sz="900" b="0" i="0">
+                <a:solidFill>
+                  <a:srgbClr val="6B7B8C"/>
+                </a:solidFill>
+                <a:latin typeface="Calibri"/>
+              </a:rPr>
+              <a:t>   ·   7</a:t>
             </a:r>
           </a:p>
         </p:txBody>
@@ -10511,7 +11235,7 @@
           <p:nvPr/>
         </p:nvPicPr>
         <p:blipFill>
-          <a:blip r:embed="rId3"/>
+          <a:blip r:embed="rId4"/>
           <a:stretch>
             <a:fillRect/>
           </a:stretch>
@@ -10563,7 +11287,7 @@
                 </a:solidFill>
                 <a:latin typeface="Calibri"/>
               </a:rPr>
-              <a:t>Before even getting to question two, I dug into why. Looking year over year it became apparent: the number of events explodes in 2021, everywhere I looked, in cities under ten different state DOTs. That could be a change in how the data is measured, a change in the inputs, or a change in coverage. I wondered whether the 2021 infrastructure bill was behind it, but it was signed in November 2021 and the jump starts in March, so the timing doesn't fit. Something changed in 2021 that significantly increased the reported number of events everywhere, and that changes the story quite a bit.</a:t>
+              <a:t>I wasn't looking to answer question two yet; it just happened to be the next thing. Before going further I wanted to know why the list looked the way it did, and looking year over year it became apparent: the number of events explodes in 2021, everywhere I looked, in cities under ten different state DOTs. That could be a change in how the data is measured, a change in the inputs, or a change in coverage. I wondered whether the 2021 infrastructure bill was behind it, but it was signed in November 2021 and the jump starts in March, so the timing doesn't fit. Something changed in 2021 that significantly increased the reported number of events everywhere, and that changes the story quite a bit.</a:t>
             </a:r>
           </a:p>
         </p:txBody>
@@ -10623,7 +11347,7 @@
                 </a:solidFill>
                 <a:latin typeface="Calibri"/>
               </a:rPr>
-              <a:t>Q2: how it changed over time</a:t>
+              <a:t>Question 2: how has this changed over time? (2 of 2: all cities)</a:t>
             </a:r>
           </a:p>
         </p:txBody>
@@ -10695,8 +11419,8 @@
         </p:nvSpPr>
         <p:spPr>
           <a:xfrm>
-            <a:off x="8259775" y="6236208"/>
-            <a:ext cx="3383280" cy="502920"/>
+            <a:off x="6888175" y="6236208"/>
+            <a:ext cx="4754880" cy="502920"/>
           </a:xfrm>
           <a:prstGeom prst="rect">
             <a:avLst/>
@@ -10724,7 +11448,54 @@
                 </a:solidFill>
                 <a:latin typeface="Calibri"/>
               </a:rPr>
-              <a:t>Source: queries/04, queries/05  ·  data pulled 2026-10-26   ·   8</a:t>
+              <a:t>Source: </a:t>
+            </a:r>
+            <a:r>
+              <a:rPr sz="900" b="0" i="0" u="sng">
+                <a:solidFill>
+                  <a:srgbClr val="1368E5"/>
+                </a:solidFill>
+                <a:latin typeface="Calibri"/>
+                <a:hlinkClick r:id="rId3"/>
+              </a:rPr>
+              <a:t>query 4</a:t>
+            </a:r>
+            <a:r>
+              <a:rPr sz="900" b="0" i="0">
+                <a:solidFill>
+                  <a:srgbClr val="6B7B8C"/>
+                </a:solidFill>
+                <a:latin typeface="Calibri"/>
+              </a:rPr>
+              <a:t>, </a:t>
+            </a:r>
+            <a:r>
+              <a:rPr sz="900" b="0" i="0" u="sng">
+                <a:solidFill>
+                  <a:srgbClr val="1368E5"/>
+                </a:solidFill>
+                <a:latin typeface="Calibri"/>
+                <a:hlinkClick r:id="rId4"/>
+              </a:rPr>
+              <a:t>query 5</a:t>
+            </a:r>
+            <a:r>
+              <a:rPr sz="900" b="0" i="0">
+                <a:solidFill>
+                  <a:srgbClr val="6B7B8C"/>
+                </a:solidFill>
+                <a:latin typeface="Calibri"/>
+              </a:rPr>
+              <a:t>   ·   data pulled 2026-10-26</a:t>
+            </a:r>
+            <a:r>
+              <a:rPr sz="900" b="0" i="0">
+                <a:solidFill>
+                  <a:srgbClr val="6B7B8C"/>
+                </a:solidFill>
+                <a:latin typeface="Calibri"/>
+              </a:rPr>
+              <a:t>   ·   8</a:t>
             </a:r>
           </a:p>
         </p:txBody>
@@ -10738,7 +11509,7 @@
           <p:nvPr/>
         </p:nvPicPr>
         <p:blipFill>
-          <a:blip r:embed="rId3"/>
+          <a:blip r:embed="rId5"/>
           <a:stretch>
             <a:fillRect/>
           </a:stretch>
@@ -11807,7 +12578,7 @@
                 </a:solidFill>
                 <a:latin typeface="Calibri"/>
               </a:rPr>
-              <a:t>Q3: the ten largest cities, accounting for size</a:t>
+              <a:t>Question 3: accounting for varying city sizes, how do the ten largest US cities compare?</a:t>
             </a:r>
           </a:p>
         </p:txBody>
@@ -11879,8 +12650,8 @@
         </p:nvSpPr>
         <p:spPr>
           <a:xfrm>
-            <a:off x="8259775" y="6236208"/>
-            <a:ext cx="3383280" cy="502920"/>
+            <a:off x="6888175" y="6236208"/>
+            <a:ext cx="4754880" cy="502920"/>
           </a:xfrm>
           <a:prstGeom prst="rect">
             <a:avLst/>
@@ -11908,7 +12679,54 @@
                 </a:solidFill>
                 <a:latin typeface="Calibri"/>
               </a:rPr>
-              <a:t>Source: queries/07, fct_city_comparison  ·  data pulled 2026-10-26   ·   9</a:t>
+              <a:t>Source: </a:t>
+            </a:r>
+            <a:r>
+              <a:rPr sz="900" b="0" i="0" u="sng">
+                <a:solidFill>
+                  <a:srgbClr val="1368E5"/>
+                </a:solidFill>
+                <a:latin typeface="Calibri"/>
+                <a:hlinkClick r:id="rId3"/>
+              </a:rPr>
+              <a:t>query 7</a:t>
+            </a:r>
+            <a:r>
+              <a:rPr sz="900" b="0" i="0">
+                <a:solidFill>
+                  <a:srgbClr val="6B7B8C"/>
+                </a:solidFill>
+                <a:latin typeface="Calibri"/>
+              </a:rPr>
+              <a:t>, </a:t>
+            </a:r>
+            <a:r>
+              <a:rPr sz="900" b="0" i="0" u="sng">
+                <a:solidFill>
+                  <a:srgbClr val="1368E5"/>
+                </a:solidFill>
+                <a:latin typeface="Calibri"/>
+                <a:hlinkClick r:id="rId4"/>
+              </a:rPr>
+              <a:t>fct_city_comparison</a:t>
+            </a:r>
+            <a:r>
+              <a:rPr sz="900" b="0" i="0">
+                <a:solidFill>
+                  <a:srgbClr val="6B7B8C"/>
+                </a:solidFill>
+                <a:latin typeface="Calibri"/>
+              </a:rPr>
+              <a:t>   ·   data pulled 2026-10-26</a:t>
+            </a:r>
+            <a:r>
+              <a:rPr sz="900" b="0" i="0">
+                <a:solidFill>
+                  <a:srgbClr val="6B7B8C"/>
+                </a:solidFill>
+                <a:latin typeface="Calibri"/>
+              </a:rPr>
+              <a:t>   ·   9</a:t>
             </a:r>
           </a:p>
         </p:txBody>
@@ -11922,7 +12740,7 @@
           <p:nvPr/>
         </p:nvPicPr>
         <p:blipFill>
-          <a:blip r:embed="rId3"/>
+          <a:blip r:embed="rId5"/>
           <a:stretch>
             <a:fillRect/>
           </a:stretch>
@@ -12647,7 +13465,7 @@
                 </a:solidFill>
                 <a:latin typeface="Calibri"/>
               </a:rPr>
-              <a:t>I don't think any two big cities differ eighty-fold in actual roadwork. I think it is how much each state publishes to these feeds. That is a hypothesis; I can't prove it from this data alone, and the appendix says what would.</a:t>
+              <a:t>I don't think any two big cities differ eighty-fold in actual roadwork. I think it is how much each state publishes to these feeds. That is a hypothesis; I can't prove it from this data alone, and the last slide says what would.</a:t>
             </a:r>
           </a:p>
         </p:txBody>
